--- a/tests/output/check_tool/deck.pptx
+++ b/tests/output/check_tool/deck.pptx
@@ -3128,6 +3128,7 @@
               </a:defRPr>
             </a:pPr>
             <a:r>
+              <a:rPr/>
               <a:t>Cover</a:t>
             </a:r>
           </a:p>
@@ -3190,6 +3191,7 @@
               </a:defRPr>
             </a:pPr>
             <a:r>
+              <a:rPr/>
               <a:t>Content</a:t>
             </a:r>
           </a:p>
